--- a/docs/genetic_prediction_slides.pptx
+++ b/docs/genetic_prediction_slides.pptx
@@ -7076,7 +7076,7 @@
                 <a:cs typeface="Calibri"/>
                 <a:sym typeface="Calibri"/>
               </a:rPr>
-              <a:t>A typical cycle yields ~3–5 viable, euploid embryos (maybe 10 in a good case). Selection from a small batch can't move you far.</a:t>
+              <a:t>A typical cycle yields ~3–5 viable, euploid embryos (maybe 10 in a good case). Only ~55% of transfers reach live birth, so the effective batch is smaller still: n_eff ≈ 0.55 · n.</a:t>
             </a:r>
             <a:endParaRPr b="0" i="0" sz="1250" u="none" cap="none" strike="noStrike">
               <a:solidFill>
@@ -7583,7 +7583,7 @@
                 <a:cs typeface="Cambria"/>
                 <a:sym typeface="Cambria"/>
               </a:rPr>
-              <a:t>≈3–4 cm</a:t>
+              <a:t>≈2.5–3 cm</a:t>
             </a:r>
             <a:endParaRPr b="0" i="0" sz="3300" u="none" cap="none" strike="noStrike">
               <a:solidFill>
@@ -7709,7 +7709,7 @@
                 <a:cs typeface="Cambria"/>
                 <a:sym typeface="Cambria"/>
               </a:rPr>
-              <a:t>≈3–4 IQ pts</a:t>
+              <a:t>≈2.5–3 IQ pts</a:t>
             </a:r>
             <a:endParaRPr b="0" i="0" sz="3300" u="none" cap="none" strike="noStrike">
               <a:solidFill>
@@ -7809,7 +7809,7 @@
                 <a:cs typeface="Calibri"/>
                 <a:sym typeface="Calibri"/>
               </a:rPr>
-              <a:t>(best of 5: ≈2.5–3)</a:t>
+              <a:t>(best of 5: ≈1.5–2)</a:t>
             </a:r>
             <a:endParaRPr b="0" i="0" sz="1150" u="none" cap="none" strike="noStrike">
               <a:solidFill>
@@ -8113,7 +8113,7 @@
                 <a:cs typeface="Calibri"/>
                 <a:sym typeface="Calibri"/>
               </a:rPr>
-              <a:t>Back-of-envelope: gain ≈ c(n) · √(r²/2) · SD, with c(5) ≈ 1.2 and c(10) ≈ 1.5, plus a within-family haircut; the oft-quoted ≈2.5 figures are this math with 2019-era predictors (Karavani et al. 2019).</a:t>
+              <a:t>Back-of-envelope: gain ≈ c(n_eff) · √(r²/2) · SD, with c(5) ≈ 1.2 and c(10) ≈ 1.5. A failed transfer drops you to the runner-up, so 10 embryos behave like ~5.5 and the figures above are post-attrition (Karavani et al. 2019).</a:t>
             </a:r>
             <a:endParaRPr b="0" i="0" sz="1000" u="none" cap="none" strike="noStrike">
               <a:solidFill>
@@ -8967,7 +8967,7 @@
                 <a:cs typeface="Cambria"/>
                 <a:sym typeface="Cambria"/>
               </a:rPr>
-              <a:t>+0.5 QALY</a:t>
+              <a:t>+0.35 QALY</a:t>
             </a:r>
             <a:endParaRPr b="0" i="0" sz="3200" u="none" cap="none" strike="noStrike">
               <a:solidFill>
@@ -9219,7 +9219,7 @@
                 <a:cs typeface="Calibri"/>
                 <a:sym typeface="Calibri"/>
               </a:rPr>
-              <a:t>Demo embryo report and the predictor-scaling analysis are linked from the README.</a:t>
+              <a:t>Only ~55% of transfers reach live birth, so 5 embryos behave like n_eff ≈ 2.75. Demo embryo report and the predictor-scaling analysis are linked from the README.</a:t>
             </a:r>
             <a:endParaRPr b="0" i="0" sz="1150" u="none" cap="none" strike="noStrike">
               <a:solidFill>
@@ -9566,7 +9566,7 @@
                 <a:cs typeface="Calibri"/>
                 <a:sym typeface="Calibri"/>
               </a:rPr>
-              <a:t>Mature large numbers of eggs from reprogrammed cells (works in mice, not yet humans) and select from ~1,000 embryos instead of ~5: best-of-1,000 ≈ 3.2 SD vs. best-of-5 ≈ 1.2 SD on the predictor — roughly 3× the gain. Funding momentum comes from infertility, not selection.</a:t>
+              <a:t>Mature large numbers of eggs from reprogrammed cells (works in mice, not yet humans) and select from ~1,000 embryos instead of ~5: best-of-1,000 ≈ 3.2 SD vs. best-of-5 ≈ 1.2 SD on the predictor — roughly 3× the gain. Attrition barely dents this: you keep ~95% of the gain at 1,000 embryos vs. ~62% at 5. Funding momentum comes from infertility, not selection.</a:t>
             </a:r>
             <a:endParaRPr b="0" i="0" sz="1250" u="none" cap="none" strike="noStrike">
               <a:solidFill>
